--- a/curso_es/pptx/S80.pptx
+++ b/curso_es/pptx/S80.pptx
@@ -3799,7 +3799,7 @@
                 </a:solidFill>
                 <a:latin typeface="Nunito Sans"/>
               </a:rPr>
-              <a:t>Aitor vive con su madre y su abuela. En clase oye: «Las familias normales son padre, madre e hijos». Se siente raro. (Ejemplo inventado.)</a:t>
+              <a:t>Un chico vive con su madre y su abuela. En clase oye: «Las familias normales son padre, madre e hijos». Se siente raro. (Ejemplo inventado.)</a:t>
             </a:r>
           </a:p>
         </p:txBody>
@@ -3940,7 +3940,7 @@
                 </a:solidFill>
                 <a:latin typeface="Nunito Sans"/>
               </a:rPr>
-              <a:t>Conclusión: la familia de Aitor no es menos familia. Hay cuidado y hay vínculo.</a:t>
+              <a:t>Conclusión: la familia de ese chico no es menos familia. Hay cuidado y hay vínculo.</a:t>
             </a:r>
           </a:p>
         </p:txBody>
@@ -4126,7 +4126,7 @@
                 </a:solidFill>
                 <a:latin typeface="Nunito Sans"/>
               </a:rPr>
-              <a:t>Dylan vive con su madre, la pareja de ella y las dos hijas de esa pareja. Discuten por el baño y por el mando de la tele. (Ejemplo inventado.)</a:t>
+              <a:t>Un chico vive con su madre, la pareja de ella y las dos hijas de esa pareja. Discuten por el baño y por el mando de la tele. (Ejemplo inventado.)</a:t>
             </a:r>
           </a:p>
         </p:txBody>
@@ -4935,7 +4935,7 @@
                 </a:solidFill>
                 <a:latin typeface="Nunito Sans"/>
               </a:rPr>
-              <a:t>En la clase de Kevin, la mayoría vive con su padre y su madre. Kevin concluye: «Esa es la familia normal, y las demás no». (Ejemplo inventado.)</a:t>
+              <a:t>En la clase de un chico, la mayoría vive con su padre y su madre. Ese chico concluye: «Esa es la familia normal, y las demás no». (Ejemplo inventado.)</a:t>
             </a:r>
           </a:p>
         </p:txBody>
@@ -5094,7 +5094,7 @@
                 </a:solidFill>
                 <a:latin typeface="Nunito Sans"/>
               </a:rPr>
-              <a:t>Que algo sea frecuente no dice que sea mejor. Kevin salta de un sentido a otro sin darse cuenta.</a:t>
+              <a:t>Que algo sea frecuente no dice que sea mejor. Ese chico salta de un sentido a otro sin darse cuenta.</a:t>
             </a:r>
           </a:p>
           <a:p>
